--- a/submission/03_运行与评测包/补充案例_20260903/02_bazn2si2o7/figures/figstudio/bzso_taxonomy/deliverables/taxonomy_phase_control_editable.pptx
+++ b/submission/03_运行与评测包/补充案例_20260903/02_bazn2si2o7/figures/figstudio/bzso_taxonomy/deliverables/taxonomy_phase_control_editable.pptx
@@ -7,7 +7,7 @@
   <p:sldIdLst>
     <p:sldId id="256" r:id="rId7"/>
   </p:sldIdLst>
-  <p:sldSz cx="12191999" cy="8127999" type="screen4x3"/>
+  <p:sldSz cx="12191999" cy="6048374" type="screen4x3"/>
   <p:notesSz cx="6858000" cy="9144000"/>
   <p:defaultTextStyle>
     <a:defPPr>
@@ -502,7 +502,7 @@
           <a:lstStyle/>
           <a:p>
             <a:r>
-              <a:t>BaZn2Si2O7 合成与相控制的分类框架（第五轮 F02 双栏对照 → super_img2ppt 重建；箭头一律由枢纽指向分支，全图只有一段虚线）</a:t>
+              <a:t>BaZn2Si2O7 合成与相控制的分类框架（第六轮：印刷字号 + 内容定尺寸；箭头一律由枢纽指向分支，全图只有一段虚线） [paper=bzso] [print_width_pt=435.2]</a:t>
             </a:r>
           </a:p>
         </p:txBody>
@@ -3524,12 +3524,12 @@
         </p:nvSpPr>
         <p:spPr>
           <a:xfrm>
-            <a:off x="285749" y="317499"/>
-            <a:ext cx="4921249" cy="7492999"/>
+            <a:off x="206374" y="206374"/>
+            <a:ext cx="4349749" cy="5635624"/>
           </a:xfrm>
           <a:prstGeom prst="roundRect">
             <a:avLst>
-              <a:gd name="adj" fmla="val 2258"/>
+              <a:gd name="adj" fmla="val 2554"/>
             </a:avLst>
           </a:prstGeom>
           <a:solidFill>
@@ -3572,8 +3572,8 @@
         </p:nvSpPr>
         <p:spPr>
           <a:xfrm>
-            <a:off x="428624" y="396874"/>
-            <a:ext cx="1063624" cy="357187"/>
+            <a:off x="349249" y="285749"/>
+            <a:ext cx="1285874" cy="444499"/>
           </a:xfrm>
           <a:prstGeom prst="rect">
             <a:avLst/>
@@ -3589,7 +3589,7 @@
           <a:p>
             <a:pPr algn="l" fontAlgn="base">
               <a:lnSpc>
-                <a:spcPts val="2359"/>
+                <a:spcPts val="3015"/>
               </a:lnSpc>
               <a:spcBef>
                 <a:spcPts val="0"/>
@@ -3597,7 +3597,7 @@
               <a:spcAft>
                 <a:spcPts val="0"/>
               </a:spcAft>
-              <a:defRPr sz="1624" b="1" i="0" lang="zh-CN" dirty="0">
+              <a:defRPr sz="2062" b="1" i="0" lang="zh-CN" dirty="0">
                 <a:solidFill>
                   <a:srgbClr val="0F4F58"/>
                 </a:solidFill>
@@ -3607,7 +3607,7 @@
               </a:defRPr>
             </a:pPr>
             <a:r>
-              <a:rPr sz="1624" b="1" i="0" lang="zh-CN" dirty="0">
+              <a:rPr sz="2062" b="1" i="0" lang="zh-CN" dirty="0">
                 <a:solidFill>
                   <a:srgbClr val="0F4F58"/>
                 </a:solidFill>
@@ -3628,12 +3628,12 @@
         </p:nvSpPr>
         <p:spPr>
           <a:xfrm>
-            <a:off x="6984999" y="317499"/>
-            <a:ext cx="4889499" cy="7492999"/>
+            <a:off x="6969124" y="206374"/>
+            <a:ext cx="5016499" cy="5635624"/>
           </a:xfrm>
           <a:prstGeom prst="roundRect">
             <a:avLst>
-              <a:gd name="adj" fmla="val 2272"/>
+              <a:gd name="adj" fmla="val 2215"/>
             </a:avLst>
           </a:prstGeom>
           <a:solidFill>
@@ -3676,8 +3676,8 @@
         </p:nvSpPr>
         <p:spPr>
           <a:xfrm>
-            <a:off x="7127874" y="396874"/>
-            <a:ext cx="1063624" cy="357187"/>
+            <a:off x="7111999" y="285749"/>
+            <a:ext cx="1285874" cy="444499"/>
           </a:xfrm>
           <a:prstGeom prst="rect">
             <a:avLst/>
@@ -3693,7 +3693,7 @@
           <a:p>
             <a:pPr algn="l" fontAlgn="base">
               <a:lnSpc>
-                <a:spcPts val="2359"/>
+                <a:spcPts val="3015"/>
               </a:lnSpc>
               <a:spcBef>
                 <a:spcPts val="0"/>
@@ -3701,7 +3701,7 @@
               <a:spcAft>
                 <a:spcPts val="0"/>
               </a:spcAft>
-              <a:defRPr sz="1624" b="1" i="0" lang="zh-CN" dirty="0">
+              <a:defRPr sz="2062" b="1" i="0" lang="zh-CN" dirty="0">
                 <a:solidFill>
                   <a:srgbClr val="2B3E57"/>
                 </a:solidFill>
@@ -3711,7 +3711,7 @@
               </a:defRPr>
             </a:pPr>
             <a:r>
-              <a:rPr sz="1624" b="1" i="0" lang="zh-CN" dirty="0">
+              <a:rPr sz="2062" b="1" i="0" lang="zh-CN" dirty="0">
                 <a:solidFill>
                   <a:srgbClr val="2B3E57"/>
                 </a:solidFill>
@@ -3732,12 +3732,12 @@
         </p:nvSpPr>
         <p:spPr>
           <a:xfrm>
-            <a:off x="5222874" y="3016249"/>
-            <a:ext cx="1746249" cy="2222499"/>
+            <a:off x="4810124" y="2246312"/>
+            <a:ext cx="1904999" cy="2016124"/>
           </a:xfrm>
           <a:prstGeom prst="roundRect">
             <a:avLst>
-              <a:gd name="adj" fmla="val 4090"/>
+              <a:gd name="adj" fmla="val 3750"/>
             </a:avLst>
           </a:prstGeom>
           <a:solidFill>
@@ -3780,7 +3780,7 @@
         </p:nvCxnSpPr>
         <p:spPr>
           <a:xfrm>
-            <a:off x="5841999" y="3476624"/>
+            <a:off x="5508624" y="2563812"/>
             <a:ext cx="508000" cy="0"/>
           </a:xfrm>
           <a:prstGeom prst="line">
@@ -3816,7 +3816,7 @@
         </p:nvCxnSpPr>
         <p:spPr>
           <a:xfrm>
-            <a:off x="5841999" y="3476624"/>
+            <a:off x="5508624" y="2563812"/>
             <a:ext cx="0" cy="508000"/>
           </a:xfrm>
           <a:prstGeom prst="line">
@@ -3852,7 +3852,7 @@
         </p:nvCxnSpPr>
         <p:spPr>
           <a:xfrm>
-            <a:off x="5841999" y="3730624"/>
+            <a:off x="5508624" y="2817812"/>
             <a:ext cx="508000" cy="0"/>
           </a:xfrm>
           <a:prstGeom prst="line">
@@ -3888,7 +3888,7 @@
         </p:nvCxnSpPr>
         <p:spPr>
           <a:xfrm>
-            <a:off x="6095999" y="3476624"/>
+            <a:off x="5762624" y="2563812"/>
             <a:ext cx="0" cy="508000"/>
           </a:xfrm>
           <a:prstGeom prst="line">
@@ -3924,7 +3924,7 @@
         </p:nvCxnSpPr>
         <p:spPr>
           <a:xfrm>
-            <a:off x="5841999" y="3984624"/>
+            <a:off x="5508624" y="3071812"/>
             <a:ext cx="508000" cy="0"/>
           </a:xfrm>
           <a:prstGeom prst="line">
@@ -3960,7 +3960,7 @@
         </p:nvCxnSpPr>
         <p:spPr>
           <a:xfrm>
-            <a:off x="6349999" y="3476624"/>
+            <a:off x="6016624" y="2563812"/>
             <a:ext cx="0" cy="508000"/>
           </a:xfrm>
           <a:prstGeom prst="line">
@@ -3996,7 +3996,7 @@
         </p:nvSpPr>
         <p:spPr>
           <a:xfrm>
-            <a:off x="5786437" y="3421062"/>
+            <a:off x="5453062" y="2508249"/>
             <a:ext cx="111124" cy="111124"/>
           </a:xfrm>
           <a:prstGeom prst="ellipse">
@@ -4040,7 +4040,7 @@
         </p:nvSpPr>
         <p:spPr>
           <a:xfrm>
-            <a:off x="5786437" y="3675062"/>
+            <a:off x="5453062" y="2762249"/>
             <a:ext cx="111124" cy="111124"/>
           </a:xfrm>
           <a:prstGeom prst="ellipse">
@@ -4084,7 +4084,7 @@
         </p:nvSpPr>
         <p:spPr>
           <a:xfrm>
-            <a:off x="5786437" y="3929062"/>
+            <a:off x="5453062" y="3016249"/>
             <a:ext cx="111124" cy="111124"/>
           </a:xfrm>
           <a:prstGeom prst="ellipse">
@@ -4128,7 +4128,7 @@
         </p:nvSpPr>
         <p:spPr>
           <a:xfrm>
-            <a:off x="6040437" y="3421062"/>
+            <a:off x="5707062" y="2508249"/>
             <a:ext cx="111124" cy="111124"/>
           </a:xfrm>
           <a:prstGeom prst="ellipse">
@@ -4172,7 +4172,7 @@
         </p:nvSpPr>
         <p:spPr>
           <a:xfrm>
-            <a:off x="6040437" y="3675062"/>
+            <a:off x="5707062" y="2762249"/>
             <a:ext cx="111124" cy="111124"/>
           </a:xfrm>
           <a:prstGeom prst="ellipse">
@@ -4216,7 +4216,7 @@
         </p:nvSpPr>
         <p:spPr>
           <a:xfrm>
-            <a:off x="6040437" y="3929062"/>
+            <a:off x="5707062" y="3016249"/>
             <a:ext cx="111124" cy="111124"/>
           </a:xfrm>
           <a:prstGeom prst="ellipse">
@@ -4260,7 +4260,7 @@
         </p:nvSpPr>
         <p:spPr>
           <a:xfrm>
-            <a:off x="6294437" y="3421062"/>
+            <a:off x="5961062" y="2508249"/>
             <a:ext cx="111124" cy="111124"/>
           </a:xfrm>
           <a:prstGeom prst="ellipse">
@@ -4304,7 +4304,7 @@
         </p:nvSpPr>
         <p:spPr>
           <a:xfrm>
-            <a:off x="6294437" y="3675062"/>
+            <a:off x="5961062" y="2762249"/>
             <a:ext cx="111124" cy="111124"/>
           </a:xfrm>
           <a:prstGeom prst="ellipse">
@@ -4348,7 +4348,7 @@
         </p:nvSpPr>
         <p:spPr>
           <a:xfrm>
-            <a:off x="6294437" y="3929062"/>
+            <a:off x="5961062" y="3016249"/>
             <a:ext cx="111124" cy="111124"/>
           </a:xfrm>
           <a:prstGeom prst="ellipse">
@@ -4392,8 +4392,8 @@
         </p:nvSpPr>
         <p:spPr>
           <a:xfrm>
-            <a:off x="5286374" y="4302124"/>
-            <a:ext cx="1619249" cy="380999"/>
+            <a:off x="4905374" y="3294062"/>
+            <a:ext cx="1714499" cy="420687"/>
           </a:xfrm>
           <a:prstGeom prst="rect">
             <a:avLst/>
@@ -4409,7 +4409,7 @@
           <a:p>
             <a:pPr algn="ctr" fontAlgn="base">
               <a:lnSpc>
-                <a:spcPts val="1984"/>
+                <a:spcPts val="2281"/>
               </a:lnSpc>
               <a:spcBef>
                 <a:spcPts val="0"/>
@@ -4417,7 +4417,7 @@
               <a:spcAft>
                 <a:spcPts val="0"/>
               </a:spcAft>
-              <a:defRPr sz="1687" b="1" i="0" lang="zh-CN" dirty="0">
+              <a:defRPr sz="1937" b="1" i="0" lang="zh-CN" dirty="0">
                 <a:solidFill>
                   <a:srgbClr val="0F4F58"/>
                 </a:solidFill>
@@ -4427,7 +4427,7 @@
               </a:defRPr>
             </a:pPr>
             <a:r>
-              <a:rPr sz="1687" b="1" i="0" lang="zh-CN" dirty="0">
+              <a:rPr sz="1937" b="1" i="0" lang="zh-CN" dirty="0">
                 <a:solidFill>
                   <a:srgbClr val="0F4F58"/>
                 </a:solidFill>
@@ -4448,8 +4448,8 @@
         </p:nvSpPr>
         <p:spPr>
           <a:xfrm>
-            <a:off x="5381624" y="4714874"/>
-            <a:ext cx="1428749" cy="285749"/>
+            <a:off x="4905374" y="3714749"/>
+            <a:ext cx="1714499" cy="373062"/>
           </a:xfrm>
           <a:prstGeom prst="rect">
             <a:avLst/>
@@ -4465,7 +4465,7 @@
           <a:p>
             <a:pPr algn="ctr" fontAlgn="base">
               <a:lnSpc>
-                <a:spcPts val="1828"/>
+                <a:spcPts val="2546"/>
               </a:lnSpc>
               <a:spcBef>
                 <a:spcPts val="0"/>
@@ -4473,7 +4473,7 @@
               <a:spcAft>
                 <a:spcPts val="0"/>
               </a:spcAft>
-              <a:defRPr sz="1249" b="1" i="0" lang="zh-CN" dirty="0">
+              <a:defRPr sz="1749" b="0" i="0" lang="zh-CN" dirty="0">
                 <a:solidFill>
                   <a:srgbClr val="0F4F58"/>
                 </a:solidFill>
@@ -4483,7 +4483,7 @@
               </a:defRPr>
             </a:pPr>
             <a:r>
-              <a:rPr sz="1249" b="1" i="0" lang="zh-CN" dirty="0">
+              <a:rPr sz="1749" b="0" i="0" lang="zh-CN" dirty="0">
                 <a:solidFill>
                   <a:srgbClr val="0F4F58"/>
                 </a:solidFill>
@@ -4504,12 +4504,12 @@
         </p:nvSpPr>
         <p:spPr>
           <a:xfrm>
-            <a:off x="523874" y="952499"/>
-            <a:ext cx="3651249" cy="1396999"/>
+            <a:off x="333374" y="809624"/>
+            <a:ext cx="3222624" cy="1079499"/>
           </a:xfrm>
           <a:prstGeom prst="roundRect">
             <a:avLst>
-              <a:gd name="adj" fmla="val 5113"/>
+              <a:gd name="adj" fmla="val 6617"/>
             </a:avLst>
           </a:prstGeom>
           <a:solidFill>
@@ -4552,12 +4552,12 @@
         </p:nvSpPr>
         <p:spPr>
           <a:xfrm>
-            <a:off x="523874" y="952499"/>
-            <a:ext cx="63499" cy="1396999"/>
+            <a:off x="333374" y="809624"/>
+            <a:ext cx="47624" cy="1079499"/>
           </a:xfrm>
           <a:prstGeom prst="roundRect">
             <a:avLst>
-              <a:gd name="adj" fmla="val 37500"/>
+              <a:gd name="adj" fmla="val 50000"/>
             </a:avLst>
           </a:prstGeom>
           <a:solidFill>
@@ -4598,8 +4598,8 @@
         </p:nvCxnSpPr>
         <p:spPr>
           <a:xfrm>
-            <a:off x="825499" y="1357312"/>
-            <a:ext cx="269875" cy="0"/>
+            <a:off x="547687" y="1230312"/>
+            <a:ext cx="238125" cy="0"/>
           </a:xfrm>
           <a:prstGeom prst="line">
             <a:avLst/>
@@ -4634,8 +4634,8 @@
         </p:nvCxnSpPr>
         <p:spPr>
           <a:xfrm>
-            <a:off x="825499" y="1357312"/>
-            <a:ext cx="0" cy="277812"/>
+            <a:off x="547687" y="1230312"/>
+            <a:ext cx="0" cy="238125"/>
           </a:xfrm>
           <a:prstGeom prst="line">
             <a:avLst/>
@@ -4670,8 +4670,8 @@
         </p:nvCxnSpPr>
         <p:spPr>
           <a:xfrm>
-            <a:off x="825499" y="1492249"/>
-            <a:ext cx="269875" cy="0"/>
+            <a:off x="547687" y="1349374"/>
+            <a:ext cx="238125" cy="0"/>
           </a:xfrm>
           <a:prstGeom prst="line">
             <a:avLst/>
@@ -4706,8 +4706,8 @@
         </p:nvCxnSpPr>
         <p:spPr>
           <a:xfrm>
-            <a:off x="960437" y="1357312"/>
-            <a:ext cx="0" cy="277812"/>
+            <a:off x="666749" y="1230312"/>
+            <a:ext cx="0" cy="238125"/>
           </a:xfrm>
           <a:prstGeom prst="line">
             <a:avLst/>
@@ -4742,8 +4742,8 @@
         </p:nvCxnSpPr>
         <p:spPr>
           <a:xfrm>
-            <a:off x="825499" y="1635124"/>
-            <a:ext cx="269875" cy="0"/>
+            <a:off x="547687" y="1468437"/>
+            <a:ext cx="238125" cy="0"/>
           </a:xfrm>
           <a:prstGeom prst="line">
             <a:avLst/>
@@ -4778,8 +4778,8 @@
         </p:nvCxnSpPr>
         <p:spPr>
           <a:xfrm>
-            <a:off x="1095374" y="1357312"/>
-            <a:ext cx="0" cy="277812"/>
+            <a:off x="785812" y="1230312"/>
+            <a:ext cx="0" cy="238125"/>
           </a:xfrm>
           <a:prstGeom prst="line">
             <a:avLst/>
@@ -4814,8 +4814,8 @@
         </p:nvSpPr>
         <p:spPr>
           <a:xfrm>
-            <a:off x="793749" y="1325562"/>
-            <a:ext cx="63499" cy="63499"/>
+            <a:off x="515937" y="1198562"/>
+            <a:ext cx="55562" cy="55562"/>
           </a:xfrm>
           <a:prstGeom prst="ellipse">
             <a:avLst/>
@@ -4858,8 +4858,8 @@
         </p:nvSpPr>
         <p:spPr>
           <a:xfrm>
-            <a:off x="793749" y="1468437"/>
-            <a:ext cx="63499" cy="63499"/>
+            <a:off x="515937" y="1325562"/>
+            <a:ext cx="55562" cy="55562"/>
           </a:xfrm>
           <a:prstGeom prst="ellipse">
             <a:avLst/>
@@ -4902,8 +4902,8 @@
         </p:nvSpPr>
         <p:spPr>
           <a:xfrm>
-            <a:off x="793749" y="1603374"/>
-            <a:ext cx="63499" cy="63499"/>
+            <a:off x="515937" y="1444624"/>
+            <a:ext cx="55562" cy="55562"/>
           </a:xfrm>
           <a:prstGeom prst="ellipse">
             <a:avLst/>
@@ -4946,8 +4946,8 @@
         </p:nvSpPr>
         <p:spPr>
           <a:xfrm>
-            <a:off x="928687" y="1325562"/>
-            <a:ext cx="63499" cy="63499"/>
+            <a:off x="642937" y="1198562"/>
+            <a:ext cx="55562" cy="55562"/>
           </a:xfrm>
           <a:prstGeom prst="ellipse">
             <a:avLst/>
@@ -4990,8 +4990,8 @@
         </p:nvSpPr>
         <p:spPr>
           <a:xfrm>
-            <a:off x="928687" y="1468437"/>
-            <a:ext cx="63499" cy="63499"/>
+            <a:off x="642937" y="1325562"/>
+            <a:ext cx="55562" cy="55562"/>
           </a:xfrm>
           <a:prstGeom prst="ellipse">
             <a:avLst/>
@@ -5034,8 +5034,8 @@
         </p:nvSpPr>
         <p:spPr>
           <a:xfrm>
-            <a:off x="928687" y="1603374"/>
-            <a:ext cx="63499" cy="63499"/>
+            <a:off x="642937" y="1444624"/>
+            <a:ext cx="55562" cy="55562"/>
           </a:xfrm>
           <a:prstGeom prst="ellipse">
             <a:avLst/>
@@ -5078,8 +5078,8 @@
         </p:nvSpPr>
         <p:spPr>
           <a:xfrm>
-            <a:off x="1063624" y="1325562"/>
-            <a:ext cx="63499" cy="63499"/>
+            <a:off x="761999" y="1198562"/>
+            <a:ext cx="55562" cy="55562"/>
           </a:xfrm>
           <a:prstGeom prst="ellipse">
             <a:avLst/>
@@ -5122,8 +5122,8 @@
         </p:nvSpPr>
         <p:spPr>
           <a:xfrm>
-            <a:off x="1063624" y="1468437"/>
-            <a:ext cx="63499" cy="63499"/>
+            <a:off x="761999" y="1325562"/>
+            <a:ext cx="55562" cy="55562"/>
           </a:xfrm>
           <a:prstGeom prst="ellipse">
             <a:avLst/>
@@ -5166,8 +5166,8 @@
         </p:nvSpPr>
         <p:spPr>
           <a:xfrm>
-            <a:off x="1063624" y="1603374"/>
-            <a:ext cx="63499" cy="63499"/>
+            <a:off x="761999" y="1444624"/>
+            <a:ext cx="55562" cy="55562"/>
           </a:xfrm>
           <a:prstGeom prst="ellipse">
             <a:avLst/>
@@ -5210,8 +5210,8 @@
         </p:nvSpPr>
         <p:spPr>
           <a:xfrm>
-            <a:off x="1269999" y="1325562"/>
-            <a:ext cx="2746374" cy="341312"/>
+            <a:off x="936624" y="944562"/>
+            <a:ext cx="2524124" cy="420687"/>
           </a:xfrm>
           <a:prstGeom prst="rect">
             <a:avLst/>
@@ -5227,7 +5227,7 @@
           <a:p>
             <a:pPr algn="l" fontAlgn="base">
               <a:lnSpc>
-                <a:spcPts val="2265"/>
+                <a:spcPts val="2812"/>
               </a:lnSpc>
               <a:spcBef>
                 <a:spcPts val="0"/>
@@ -5235,7 +5235,7 @@
               <a:spcAft>
                 <a:spcPts val="0"/>
               </a:spcAft>
-              <a:defRPr sz="1562" b="1" i="0" lang="zh-CN" dirty="0">
+              <a:defRPr sz="1937" b="1" i="0" lang="zh-CN" dirty="0">
                 <a:solidFill>
                   <a:srgbClr val="0F4F58"/>
                 </a:solidFill>
@@ -5245,7 +5245,7 @@
               </a:defRPr>
             </a:pPr>
             <a:r>
-              <a:rPr sz="1562" b="1" i="0" lang="zh-CN" dirty="0">
+              <a:rPr sz="1937" b="1" i="0" lang="zh-CN" dirty="0">
                 <a:solidFill>
                   <a:srgbClr val="0F4F58"/>
                 </a:solidFill>
@@ -5266,8 +5266,8 @@
         </p:nvSpPr>
         <p:spPr>
           <a:xfrm>
-            <a:off x="1269999" y="1698624"/>
-            <a:ext cx="2746374" cy="277812"/>
+            <a:off x="936624" y="1381124"/>
+            <a:ext cx="2524124" cy="373062"/>
           </a:xfrm>
           <a:prstGeom prst="rect">
             <a:avLst/>
@@ -5283,7 +5283,7 @@
           <a:p>
             <a:pPr algn="l" fontAlgn="base">
               <a:lnSpc>
-                <a:spcPts val="1828"/>
+                <a:spcPts val="2546"/>
               </a:lnSpc>
               <a:spcBef>
                 <a:spcPts val="0"/>
@@ -5291,7 +5291,7 @@
               <a:spcAft>
                 <a:spcPts val="0"/>
               </a:spcAft>
-              <a:defRPr sz="1249" b="1" i="0" lang="zh-CN" dirty="0">
+              <a:defRPr sz="1749" b="0" i="0" lang="zh-CN" dirty="0">
                 <a:solidFill>
                   <a:srgbClr val="27303A"/>
                 </a:solidFill>
@@ -5301,7 +5301,7 @@
               </a:defRPr>
             </a:pPr>
             <a:r>
-              <a:rPr sz="1249" b="1" i="0" lang="zh-CN" dirty="0">
+              <a:rPr sz="1749" b="0" i="0" lang="zh-CN" dirty="0">
                 <a:solidFill>
                   <a:srgbClr val="27303A"/>
                 </a:solidFill>
@@ -5312,7 +5312,7 @@
               <a:t>相变</a:t>
             </a:r>
             <a:r>
-              <a:rPr sz="1249" b="1" i="0" lang="zh-CN" dirty="0">
+              <a:rPr sz="1749" b="0" i="0" lang="zh-CN" dirty="0">
                 <a:solidFill>
                   <a:srgbClr val="27303A"/>
                 </a:solidFill>
@@ -5323,7 +5323,7 @@
               <a:t> · </a:t>
             </a:r>
             <a:r>
-              <a:rPr sz="1249" b="1" i="0" lang="zh-CN" dirty="0">
+              <a:rPr sz="1749" b="0" i="0" lang="zh-CN" dirty="0">
                 <a:solidFill>
                   <a:srgbClr val="27303A"/>
                 </a:solidFill>
@@ -5344,12 +5344,12 @@
         </p:nvSpPr>
         <p:spPr>
           <a:xfrm>
-            <a:off x="523874" y="2619374"/>
-            <a:ext cx="3651249" cy="1396999"/>
+            <a:off x="333374" y="2079624"/>
+            <a:ext cx="3222624" cy="1079499"/>
           </a:xfrm>
           <a:prstGeom prst="roundRect">
             <a:avLst>
-              <a:gd name="adj" fmla="val 5113"/>
+              <a:gd name="adj" fmla="val 6617"/>
             </a:avLst>
           </a:prstGeom>
           <a:solidFill>
@@ -5392,12 +5392,12 @@
         </p:nvSpPr>
         <p:spPr>
           <a:xfrm>
-            <a:off x="523874" y="2619374"/>
-            <a:ext cx="63499" cy="1396999"/>
+            <a:off x="333374" y="2079624"/>
+            <a:ext cx="47624" cy="1079499"/>
           </a:xfrm>
           <a:prstGeom prst="roundRect">
             <a:avLst>
-              <a:gd name="adj" fmla="val 37500"/>
+              <a:gd name="adj" fmla="val 50000"/>
             </a:avLst>
           </a:prstGeom>
           <a:solidFill>
@@ -5438,8 +5438,8 @@
         </p:nvCxnSpPr>
         <p:spPr>
           <a:xfrm>
-            <a:off x="920749" y="2992437"/>
-            <a:ext cx="0" cy="119062"/>
+            <a:off x="627062" y="2468562"/>
+            <a:ext cx="0" cy="103187"/>
           </a:xfrm>
           <a:prstGeom prst="line">
             <a:avLst/>
@@ -5474,8 +5474,8 @@
         </p:nvCxnSpPr>
         <p:spPr>
           <a:xfrm flipH="1">
-            <a:off x="809624" y="3111499"/>
-            <a:ext cx="111125" cy="214313"/>
+            <a:off x="531812" y="2571749"/>
+            <a:ext cx="95250" cy="190500"/>
           </a:xfrm>
           <a:prstGeom prst="line">
             <a:avLst/>
@@ -5510,8 +5510,8 @@
         </p:nvCxnSpPr>
         <p:spPr>
           <a:xfrm>
-            <a:off x="809624" y="3325812"/>
-            <a:ext cx="301625" cy="0"/>
+            <a:off x="531812" y="2762249"/>
+            <a:ext cx="269875" cy="0"/>
           </a:xfrm>
           <a:prstGeom prst="line">
             <a:avLst/>
@@ -5546,8 +5546,8 @@
         </p:nvCxnSpPr>
         <p:spPr>
           <a:xfrm flipH="1" flipV="1">
-            <a:off x="1000124" y="3111499"/>
-            <a:ext cx="111125" cy="214313"/>
+            <a:off x="706437" y="2571749"/>
+            <a:ext cx="95250" cy="190500"/>
           </a:xfrm>
           <a:prstGeom prst="line">
             <a:avLst/>
@@ -5582,8 +5582,8 @@
         </p:nvCxnSpPr>
         <p:spPr>
           <a:xfrm flipV="1">
-            <a:off x="1000124" y="2992437"/>
-            <a:ext cx="0" cy="119062"/>
+            <a:off x="706437" y="2468562"/>
+            <a:ext cx="0" cy="103187"/>
           </a:xfrm>
           <a:prstGeom prst="line">
             <a:avLst/>
@@ -5618,8 +5618,8 @@
         </p:nvCxnSpPr>
         <p:spPr>
           <a:xfrm>
-            <a:off x="896937" y="2992437"/>
-            <a:ext cx="127000" cy="0"/>
+            <a:off x="611187" y="2468562"/>
+            <a:ext cx="111125" cy="0"/>
           </a:xfrm>
           <a:prstGeom prst="line">
             <a:avLst/>
@@ -5654,7 +5654,7 @@
         </p:nvSpPr>
         <p:spPr>
           <a:xfrm>
-            <a:off x="912812" y="3230562"/>
+            <a:off x="619124" y="2682874"/>
             <a:ext cx="31749" cy="31749"/>
           </a:xfrm>
           <a:prstGeom prst="ellipse">
@@ -5698,7 +5698,7 @@
         </p:nvSpPr>
         <p:spPr>
           <a:xfrm>
-            <a:off x="984249" y="3262312"/>
+            <a:off x="682624" y="2706687"/>
             <a:ext cx="23812" cy="23812"/>
           </a:xfrm>
           <a:prstGeom prst="ellipse">
@@ -5742,8 +5742,8 @@
         </p:nvSpPr>
         <p:spPr>
           <a:xfrm>
-            <a:off x="1269999" y="2992437"/>
-            <a:ext cx="2746374" cy="341312"/>
+            <a:off x="936624" y="2214562"/>
+            <a:ext cx="2524124" cy="420687"/>
           </a:xfrm>
           <a:prstGeom prst="rect">
             <a:avLst/>
@@ -5759,7 +5759,7 @@
           <a:p>
             <a:pPr algn="l" fontAlgn="base">
               <a:lnSpc>
-                <a:spcPts val="2265"/>
+                <a:spcPts val="2812"/>
               </a:lnSpc>
               <a:spcBef>
                 <a:spcPts val="0"/>
@@ -5767,7 +5767,7 @@
               <a:spcAft>
                 <a:spcPts val="0"/>
               </a:spcAft>
-              <a:defRPr sz="1562" b="1" i="0" lang="zh-CN" dirty="0">
+              <a:defRPr sz="1937" b="1" i="0" lang="zh-CN" dirty="0">
                 <a:solidFill>
                   <a:srgbClr val="0F4F58"/>
                 </a:solidFill>
@@ -5777,7 +5777,7 @@
               </a:defRPr>
             </a:pPr>
             <a:r>
-              <a:rPr sz="1562" b="1" i="0" lang="zh-CN" dirty="0">
+              <a:rPr sz="1937" b="1" i="0" lang="zh-CN" dirty="0">
                 <a:solidFill>
                   <a:srgbClr val="0F4F58"/>
                 </a:solidFill>
@@ -5798,8 +5798,8 @@
         </p:nvSpPr>
         <p:spPr>
           <a:xfrm>
-            <a:off x="1269999" y="3365499"/>
-            <a:ext cx="2746374" cy="277812"/>
+            <a:off x="936624" y="2651124"/>
+            <a:ext cx="2524124" cy="373062"/>
           </a:xfrm>
           <a:prstGeom prst="rect">
             <a:avLst/>
@@ -5815,7 +5815,7 @@
           <a:p>
             <a:pPr algn="l" fontAlgn="base">
               <a:lnSpc>
-                <a:spcPts val="1828"/>
+                <a:spcPts val="2546"/>
               </a:lnSpc>
               <a:spcBef>
                 <a:spcPts val="0"/>
@@ -5823,7 +5823,7 @@
               <a:spcAft>
                 <a:spcPts val="0"/>
               </a:spcAft>
-              <a:defRPr sz="1249" b="1" i="0" lang="zh-CN" dirty="0">
+              <a:defRPr sz="1749" b="0" i="0" lang="zh-CN" dirty="0">
                 <a:solidFill>
                   <a:srgbClr val="27303A"/>
                 </a:solidFill>
@@ -5833,7 +5833,7 @@
               </a:defRPr>
             </a:pPr>
             <a:r>
-              <a:rPr sz="1249" b="1" i="0" lang="zh-CN" dirty="0">
+              <a:rPr sz="1749" b="0" i="0" lang="zh-CN" dirty="0">
                 <a:solidFill>
                   <a:srgbClr val="27303A"/>
                 </a:solidFill>
@@ -5844,7 +5844,7 @@
               <a:t>固相</a:t>
             </a:r>
             <a:r>
-              <a:rPr sz="1249" b="1" i="0" lang="zh-CN" dirty="0">
+              <a:rPr sz="1749" b="0" i="0" lang="zh-CN" dirty="0">
                 <a:solidFill>
                   <a:srgbClr val="27303A"/>
                 </a:solidFill>
@@ -5855,7 +5855,7 @@
               <a:t> · </a:t>
             </a:r>
             <a:r>
-              <a:rPr sz="1249" b="1" i="0" lang="zh-CN" dirty="0">
+              <a:rPr sz="1749" b="0" i="0" lang="zh-CN" dirty="0">
                 <a:solidFill>
                   <a:srgbClr val="27303A"/>
                 </a:solidFill>
@@ -5866,7 +5866,7 @@
               <a:t>溶胶</a:t>
             </a:r>
             <a:r>
-              <a:rPr sz="1249" b="1" i="0" lang="zh-CN" dirty="0">
+              <a:rPr sz="1749" b="0" i="0" lang="zh-CN" dirty="0">
                 <a:solidFill>
                   <a:srgbClr val="27303A"/>
                 </a:solidFill>
@@ -5877,7 +5877,7 @@
               <a:t>—</a:t>
             </a:r>
             <a:r>
-              <a:rPr sz="1249" b="1" i="0" lang="zh-CN" dirty="0">
+              <a:rPr sz="1749" b="0" i="0" lang="zh-CN" dirty="0">
                 <a:solidFill>
                   <a:srgbClr val="27303A"/>
                 </a:solidFill>
@@ -5898,12 +5898,12 @@
         </p:nvSpPr>
         <p:spPr>
           <a:xfrm>
-            <a:off x="523874" y="4286249"/>
-            <a:ext cx="3651249" cy="1396999"/>
+            <a:off x="333374" y="3349624"/>
+            <a:ext cx="3222624" cy="1079499"/>
           </a:xfrm>
           <a:prstGeom prst="roundRect">
             <a:avLst>
-              <a:gd name="adj" fmla="val 5113"/>
+              <a:gd name="adj" fmla="val 6617"/>
             </a:avLst>
           </a:prstGeom>
           <a:solidFill>
@@ -5946,12 +5946,12 @@
         </p:nvSpPr>
         <p:spPr>
           <a:xfrm>
-            <a:off x="523874" y="4286249"/>
-            <a:ext cx="63499" cy="1396999"/>
+            <a:off x="333374" y="3349624"/>
+            <a:ext cx="47624" cy="1079499"/>
           </a:xfrm>
           <a:prstGeom prst="roundRect">
             <a:avLst>
-              <a:gd name="adj" fmla="val 37500"/>
+              <a:gd name="adj" fmla="val 50000"/>
             </a:avLst>
           </a:prstGeom>
           <a:solidFill>
@@ -5992,12 +5992,12 @@
         </p:nvSpPr>
         <p:spPr>
           <a:xfrm>
-            <a:off x="920749" y="4651374"/>
-            <a:ext cx="87312" cy="246062"/>
+            <a:off x="627062" y="3730624"/>
+            <a:ext cx="79374" cy="222249"/>
           </a:xfrm>
           <a:prstGeom prst="roundRect">
             <a:avLst>
-              <a:gd name="adj" fmla="val 49090"/>
+              <a:gd name="adj" fmla="val 48000"/>
             </a:avLst>
           </a:prstGeom>
           <a:noFill/>
@@ -6038,8 +6038,8 @@
         </p:nvSpPr>
         <p:spPr>
           <a:xfrm>
-            <a:off x="888999" y="4889499"/>
-            <a:ext cx="134937" cy="134937"/>
+            <a:off x="603249" y="3944937"/>
+            <a:ext cx="119062" cy="119062"/>
           </a:xfrm>
           <a:prstGeom prst="ellipse">
             <a:avLst/>
@@ -6082,8 +6082,8 @@
         </p:nvCxnSpPr>
         <p:spPr>
           <a:xfrm>
-            <a:off x="1008062" y="4714874"/>
-            <a:ext cx="55562" cy="0"/>
+            <a:off x="714374" y="3794124"/>
+            <a:ext cx="47625" cy="0"/>
           </a:xfrm>
           <a:prstGeom prst="line">
             <a:avLst/>
@@ -6118,8 +6118,8 @@
         </p:nvCxnSpPr>
         <p:spPr>
           <a:xfrm>
-            <a:off x="1008062" y="4770437"/>
-            <a:ext cx="55562" cy="0"/>
+            <a:off x="714374" y="3833812"/>
+            <a:ext cx="47625" cy="0"/>
           </a:xfrm>
           <a:prstGeom prst="line">
             <a:avLst/>
@@ -6154,8 +6154,8 @@
         </p:nvCxnSpPr>
         <p:spPr>
           <a:xfrm>
-            <a:off x="1008062" y="4818062"/>
-            <a:ext cx="55562" cy="0"/>
+            <a:off x="714374" y="3881437"/>
+            <a:ext cx="47625" cy="0"/>
           </a:xfrm>
           <a:prstGeom prst="line">
             <a:avLst/>
@@ -6190,8 +6190,8 @@
         </p:nvSpPr>
         <p:spPr>
           <a:xfrm>
-            <a:off x="1269999" y="4659312"/>
-            <a:ext cx="2746374" cy="341312"/>
+            <a:off x="936624" y="3484562"/>
+            <a:ext cx="2524124" cy="420687"/>
           </a:xfrm>
           <a:prstGeom prst="rect">
             <a:avLst/>
@@ -6207,7 +6207,7 @@
           <a:p>
             <a:pPr algn="l" fontAlgn="base">
               <a:lnSpc>
-                <a:spcPts val="2265"/>
+                <a:spcPts val="2812"/>
               </a:lnSpc>
               <a:spcBef>
                 <a:spcPts val="0"/>
@@ -6215,7 +6215,7 @@
               <a:spcAft>
                 <a:spcPts val="0"/>
               </a:spcAft>
-              <a:defRPr sz="1562" b="1" i="0" lang="zh-CN" dirty="0">
+              <a:defRPr sz="1937" b="1" i="0" lang="zh-CN" dirty="0">
                 <a:solidFill>
                   <a:srgbClr val="0F4F58"/>
                 </a:solidFill>
@@ -6225,7 +6225,7 @@
               </a:defRPr>
             </a:pPr>
             <a:r>
-              <a:rPr sz="1562" b="1" i="0" lang="zh-CN" dirty="0">
+              <a:rPr sz="1937" b="1" i="0" lang="zh-CN" dirty="0">
                 <a:solidFill>
                   <a:srgbClr val="0F4F58"/>
                 </a:solidFill>
@@ -6246,8 +6246,8 @@
         </p:nvSpPr>
         <p:spPr>
           <a:xfrm>
-            <a:off x="1269999" y="5032374"/>
-            <a:ext cx="2746374" cy="277812"/>
+            <a:off x="936624" y="3921124"/>
+            <a:ext cx="2524124" cy="373062"/>
           </a:xfrm>
           <a:prstGeom prst="rect">
             <a:avLst/>
@@ -6263,7 +6263,7 @@
           <a:p>
             <a:pPr algn="l" fontAlgn="base">
               <a:lnSpc>
-                <a:spcPts val="1828"/>
+                <a:spcPts val="2546"/>
               </a:lnSpc>
               <a:spcBef>
                 <a:spcPts val="0"/>
@@ -6271,7 +6271,7 @@
               <a:spcAft>
                 <a:spcPts val="0"/>
               </a:spcAft>
-              <a:defRPr sz="1249" b="1" i="0" lang="zh-CN" dirty="0">
+              <a:defRPr sz="1749" b="0" i="0" lang="zh-CN" dirty="0">
                 <a:solidFill>
                   <a:srgbClr val="27303A"/>
                 </a:solidFill>
@@ -6281,7 +6281,7 @@
               </a:defRPr>
             </a:pPr>
             <a:r>
-              <a:rPr sz="1249" b="1" i="0" lang="zh-CN" dirty="0">
+              <a:rPr sz="1749" b="0" i="0" lang="zh-CN" dirty="0">
                 <a:solidFill>
                   <a:srgbClr val="27303A"/>
                 </a:solidFill>
@@ -6292,7 +6292,7 @@
               <a:t>Ba/Sr · Zn </a:t>
             </a:r>
             <a:r>
-              <a:rPr sz="1249" b="1" i="0" lang="zh-CN" dirty="0">
+              <a:rPr sz="1749" b="0" i="0" lang="zh-CN" dirty="0">
                 <a:solidFill>
                   <a:srgbClr val="27303A"/>
                 </a:solidFill>
@@ -6313,12 +6313,12 @@
         </p:nvSpPr>
         <p:spPr>
           <a:xfrm>
-            <a:off x="523874" y="5953124"/>
-            <a:ext cx="3651249" cy="1396999"/>
+            <a:off x="333374" y="4619624"/>
+            <a:ext cx="3222624" cy="1079499"/>
           </a:xfrm>
           <a:prstGeom prst="roundRect">
             <a:avLst>
-              <a:gd name="adj" fmla="val 5113"/>
+              <a:gd name="adj" fmla="val 6617"/>
             </a:avLst>
           </a:prstGeom>
           <a:solidFill>
@@ -6361,12 +6361,12 @@
         </p:nvSpPr>
         <p:spPr>
           <a:xfrm>
-            <a:off x="523874" y="5953124"/>
-            <a:ext cx="63499" cy="1396999"/>
+            <a:off x="333374" y="4619624"/>
+            <a:ext cx="47624" cy="1079499"/>
           </a:xfrm>
           <a:prstGeom prst="roundRect">
             <a:avLst>
-              <a:gd name="adj" fmla="val 37500"/>
+              <a:gd name="adj" fmla="val 50000"/>
             </a:avLst>
           </a:prstGeom>
           <a:solidFill>
@@ -6407,8 +6407,8 @@
         </p:nvCxnSpPr>
         <p:spPr>
           <a:xfrm flipH="1" flipV="1">
-            <a:off x="849312" y="6476999"/>
-            <a:ext cx="63500" cy="198438"/>
+            <a:off x="571499" y="5143499"/>
+            <a:ext cx="47625" cy="174625"/>
           </a:xfrm>
           <a:prstGeom prst="line">
             <a:avLst/>
@@ -6443,8 +6443,8 @@
         </p:nvCxnSpPr>
         <p:spPr>
           <a:xfrm flipV="1">
-            <a:off x="849312" y="6365874"/>
-            <a:ext cx="71437" cy="111125"/>
+            <a:off x="571499" y="5048249"/>
+            <a:ext cx="55563" cy="95250"/>
           </a:xfrm>
           <a:prstGeom prst="line">
             <a:avLst/>
@@ -6479,8 +6479,8 @@
         </p:nvCxnSpPr>
         <p:spPr>
           <a:xfrm>
-            <a:off x="920749" y="6365874"/>
-            <a:ext cx="47625" cy="127000"/>
+            <a:off x="627062" y="5048249"/>
+            <a:ext cx="47625" cy="111125"/>
           </a:xfrm>
           <a:prstGeom prst="line">
             <a:avLst/>
@@ -6515,8 +6515,8 @@
         </p:nvCxnSpPr>
         <p:spPr>
           <a:xfrm flipH="1">
-            <a:off x="912812" y="6492874"/>
-            <a:ext cx="55562" cy="182563"/>
+            <a:off x="619124" y="5159374"/>
+            <a:ext cx="55563" cy="158750"/>
           </a:xfrm>
           <a:prstGeom prst="line">
             <a:avLst/>
@@ -6551,8 +6551,8 @@
         </p:nvCxnSpPr>
         <p:spPr>
           <a:xfrm flipH="1" flipV="1">
-            <a:off x="976312" y="6516687"/>
-            <a:ext cx="31750" cy="158750"/>
+            <a:off x="682624" y="5175249"/>
+            <a:ext cx="31750" cy="142875"/>
           </a:xfrm>
           <a:prstGeom prst="line">
             <a:avLst/>
@@ -6587,8 +6587,8 @@
         </p:nvCxnSpPr>
         <p:spPr>
           <a:xfrm flipV="1">
-            <a:off x="976312" y="6429374"/>
-            <a:ext cx="63500" cy="87313"/>
+            <a:off x="682624" y="5095874"/>
+            <a:ext cx="55563" cy="79375"/>
           </a:xfrm>
           <a:prstGeom prst="line">
             <a:avLst/>
@@ -6623,8 +6623,8 @@
         </p:nvCxnSpPr>
         <p:spPr>
           <a:xfrm>
-            <a:off x="1039812" y="6429374"/>
-            <a:ext cx="47625" cy="103188"/>
+            <a:off x="738187" y="5095874"/>
+            <a:ext cx="39687" cy="95250"/>
           </a:xfrm>
           <a:prstGeom prst="line">
             <a:avLst/>
@@ -6659,8 +6659,8 @@
         </p:nvCxnSpPr>
         <p:spPr>
           <a:xfrm flipH="1">
-            <a:off x="1055687" y="6532562"/>
-            <a:ext cx="31750" cy="142875"/>
+            <a:off x="754062" y="5191124"/>
+            <a:ext cx="23812" cy="127000"/>
           </a:xfrm>
           <a:prstGeom prst="line">
             <a:avLst/>
@@ -6695,8 +6695,8 @@
         </p:nvSpPr>
         <p:spPr>
           <a:xfrm>
-            <a:off x="1269999" y="6326187"/>
-            <a:ext cx="2746374" cy="341312"/>
+            <a:off x="936624" y="4754562"/>
+            <a:ext cx="2524124" cy="420687"/>
           </a:xfrm>
           <a:prstGeom prst="rect">
             <a:avLst/>
@@ -6712,7 +6712,7 @@
           <a:p>
             <a:pPr algn="l" fontAlgn="base">
               <a:lnSpc>
-                <a:spcPts val="2265"/>
+                <a:spcPts val="2812"/>
               </a:lnSpc>
               <a:spcBef>
                 <a:spcPts val="0"/>
@@ -6720,7 +6720,7 @@
               <a:spcAft>
                 <a:spcPts val="0"/>
               </a:spcAft>
-              <a:defRPr sz="1562" b="1" i="0" lang="zh-CN" dirty="0">
+              <a:defRPr sz="1937" b="1" i="0" lang="zh-CN" dirty="0">
                 <a:solidFill>
                   <a:srgbClr val="0F4F58"/>
                 </a:solidFill>
@@ -6730,7 +6730,7 @@
               </a:defRPr>
             </a:pPr>
             <a:r>
-              <a:rPr sz="1562" b="1" i="0" lang="zh-CN" dirty="0">
+              <a:rPr sz="1937" b="1" i="0" lang="zh-CN" dirty="0">
                 <a:solidFill>
                   <a:srgbClr val="0F4F58"/>
                 </a:solidFill>
@@ -6751,8 +6751,8 @@
         </p:nvSpPr>
         <p:spPr>
           <a:xfrm>
-            <a:off x="1269999" y="6699249"/>
-            <a:ext cx="2746374" cy="277812"/>
+            <a:off x="936624" y="5191124"/>
+            <a:ext cx="2524124" cy="373062"/>
           </a:xfrm>
           <a:prstGeom prst="rect">
             <a:avLst/>
@@ -6768,7 +6768,7 @@
           <a:p>
             <a:pPr algn="l" fontAlgn="base">
               <a:lnSpc>
-                <a:spcPts val="1828"/>
+                <a:spcPts val="2546"/>
               </a:lnSpc>
               <a:spcBef>
                 <a:spcPts val="0"/>
@@ -6776,7 +6776,7 @@
               <a:spcAft>
                 <a:spcPts val="0"/>
               </a:spcAft>
-              <a:defRPr sz="1249" b="1" i="0" lang="zh-CN" dirty="0">
+              <a:defRPr sz="1749" b="0" i="0" lang="zh-CN" dirty="0">
                 <a:solidFill>
                   <a:srgbClr val="27303A"/>
                 </a:solidFill>
@@ -6786,7 +6786,7 @@
               </a:defRPr>
             </a:pPr>
             <a:r>
-              <a:rPr sz="1249" b="1" i="0" lang="zh-CN" dirty="0">
+              <a:rPr sz="1749" b="0" i="0" lang="zh-CN" dirty="0">
                 <a:solidFill>
                   <a:srgbClr val="27303A"/>
                 </a:solidFill>
@@ -6797,7 +6797,7 @@
               <a:t>成核</a:t>
             </a:r>
             <a:r>
-              <a:rPr sz="1249" b="1" i="0" lang="zh-CN" dirty="0">
+              <a:rPr sz="1749" b="0" i="0" lang="zh-CN" dirty="0">
                 <a:solidFill>
                   <a:srgbClr val="27303A"/>
                 </a:solidFill>
@@ -6808,7 +6808,7 @@
               <a:t> · </a:t>
             </a:r>
             <a:r>
-              <a:rPr sz="1249" b="1" i="0" lang="zh-CN" dirty="0">
+              <a:rPr sz="1749" b="0" i="0" lang="zh-CN" dirty="0">
                 <a:solidFill>
                   <a:srgbClr val="27303A"/>
                 </a:solidFill>
@@ -6829,12 +6829,12 @@
         </p:nvSpPr>
         <p:spPr>
           <a:xfrm>
-            <a:off x="7778749" y="1190624"/>
-            <a:ext cx="3889374" cy="1587499"/>
+            <a:off x="7969249" y="809624"/>
+            <a:ext cx="3889374" cy="1420812"/>
           </a:xfrm>
           <a:prstGeom prst="roundRect">
             <a:avLst>
-              <a:gd name="adj" fmla="val 4500"/>
+              <a:gd name="adj" fmla="val 5027"/>
             </a:avLst>
           </a:prstGeom>
           <a:solidFill>
@@ -6877,12 +6877,12 @@
         </p:nvSpPr>
         <p:spPr>
           <a:xfrm>
-            <a:off x="7778749" y="1190624"/>
-            <a:ext cx="63499" cy="1587499"/>
+            <a:off x="7969249" y="809624"/>
+            <a:ext cx="47624" cy="1420812"/>
           </a:xfrm>
           <a:prstGeom prst="roundRect">
             <a:avLst>
-              <a:gd name="adj" fmla="val 37500"/>
+              <a:gd name="adj" fmla="val 50000"/>
             </a:avLst>
           </a:prstGeom>
           <a:solidFill>
@@ -6923,8 +6923,8 @@
         </p:nvSpPr>
         <p:spPr>
           <a:xfrm>
-            <a:off x="8151812" y="1650999"/>
-            <a:ext cx="119062" cy="119062"/>
+            <a:off x="8247062" y="1357312"/>
+            <a:ext cx="103187" cy="103187"/>
           </a:xfrm>
           <a:prstGeom prst="rect">
             <a:avLst/>
@@ -6967,8 +6967,8 @@
         </p:nvSpPr>
         <p:spPr>
           <a:xfrm>
-            <a:off x="8024812" y="1873249"/>
-            <a:ext cx="119062" cy="119062"/>
+            <a:off x="8135937" y="1555749"/>
+            <a:ext cx="103187" cy="103187"/>
           </a:xfrm>
           <a:prstGeom prst="rect">
             <a:avLst/>
@@ -7011,8 +7011,8 @@
         </p:nvSpPr>
         <p:spPr>
           <a:xfrm>
-            <a:off x="8286749" y="1873249"/>
-            <a:ext cx="119062" cy="119062"/>
+            <a:off x="8366124" y="1555749"/>
+            <a:ext cx="103187" cy="103187"/>
           </a:xfrm>
           <a:prstGeom prst="rect">
             <a:avLst/>
@@ -7055,8 +7055,8 @@
         </p:nvCxnSpPr>
         <p:spPr>
           <a:xfrm flipH="1">
-            <a:off x="8088312" y="1770062"/>
-            <a:ext cx="127000" cy="103187"/>
+            <a:off x="8191499" y="1468437"/>
+            <a:ext cx="111125" cy="87312"/>
           </a:xfrm>
           <a:prstGeom prst="line">
             <a:avLst/>
@@ -7091,8 +7091,8 @@
         </p:nvCxnSpPr>
         <p:spPr>
           <a:xfrm>
-            <a:off x="8215312" y="1770062"/>
-            <a:ext cx="127000" cy="103187"/>
+            <a:off x="8302624" y="1468437"/>
+            <a:ext cx="111125" cy="87312"/>
           </a:xfrm>
           <a:prstGeom prst="line">
             <a:avLst/>
@@ -7127,8 +7127,8 @@
         </p:nvSpPr>
         <p:spPr>
           <a:xfrm>
-            <a:off x="8524874" y="1666874"/>
-            <a:ext cx="2984499" cy="325437"/>
+            <a:off x="8572499" y="1111249"/>
+            <a:ext cx="3190874" cy="420687"/>
           </a:xfrm>
           <a:prstGeom prst="rect">
             <a:avLst/>
@@ -7144,7 +7144,7 @@
           <a:p>
             <a:pPr algn="l" fontAlgn="base">
               <a:lnSpc>
-                <a:spcPts val="2187"/>
+                <a:spcPts val="2812"/>
               </a:lnSpc>
               <a:spcBef>
                 <a:spcPts val="0"/>
@@ -7152,7 +7152,7 @@
               <a:spcAft>
                 <a:spcPts val="0"/>
               </a:spcAft>
-              <a:defRPr sz="1499" b="1" i="0" lang="zh-CN" dirty="0">
+              <a:defRPr sz="1937" b="1" i="0" lang="zh-CN" dirty="0">
                 <a:solidFill>
                   <a:srgbClr val="2B3E57"/>
                 </a:solidFill>
@@ -7162,7 +7162,7 @@
               </a:defRPr>
             </a:pPr>
             <a:r>
-              <a:rPr sz="1499" b="1" i="0" lang="zh-CN" dirty="0">
+              <a:rPr sz="1937" b="1" i="0" lang="zh-CN" dirty="0">
                 <a:solidFill>
                   <a:srgbClr val="2B3E57"/>
                 </a:solidFill>
@@ -7183,8 +7183,8 @@
         </p:nvSpPr>
         <p:spPr>
           <a:xfrm>
-            <a:off x="8524874" y="2024062"/>
-            <a:ext cx="2984499" cy="277812"/>
+            <a:off x="8572499" y="1547812"/>
+            <a:ext cx="3190874" cy="373062"/>
           </a:xfrm>
           <a:prstGeom prst="rect">
             <a:avLst/>
@@ -7200,7 +7200,7 @@
           <a:p>
             <a:pPr algn="l" fontAlgn="base">
               <a:lnSpc>
-                <a:spcPts val="1828"/>
+                <a:spcPts val="2546"/>
               </a:lnSpc>
               <a:spcBef>
                 <a:spcPts val="0"/>
@@ -7208,7 +7208,7 @@
               <a:spcAft>
                 <a:spcPts val="0"/>
               </a:spcAft>
-              <a:defRPr sz="1249" b="1" i="0" lang="zh-CN" dirty="0">
+              <a:defRPr sz="1749" b="0" i="0" lang="zh-CN" dirty="0">
                 <a:solidFill>
                   <a:srgbClr val="27303A"/>
                 </a:solidFill>
@@ -7218,7 +7218,7 @@
               </a:defRPr>
             </a:pPr>
             <a:r>
-              <a:rPr sz="1249" b="1" i="0" lang="zh-CN" dirty="0">
+              <a:rPr sz="1749" b="0" i="0" lang="zh-CN" dirty="0">
                 <a:solidFill>
                   <a:srgbClr val="27303A"/>
                 </a:solidFill>
@@ -7229,7 +7229,7 @@
               <a:t>Ba2ZnSi2O7 </a:t>
             </a:r>
             <a:r>
-              <a:rPr sz="1249" b="1" i="0" lang="zh-CN" dirty="0">
+              <a:rPr sz="1749" b="0" i="0" lang="zh-CN" dirty="0">
                 <a:solidFill>
                   <a:srgbClr val="27303A"/>
                 </a:solidFill>
@@ -7250,12 +7250,12 @@
         </p:nvSpPr>
         <p:spPr>
           <a:xfrm>
-            <a:off x="7778749" y="3413124"/>
-            <a:ext cx="3889374" cy="1587499"/>
+            <a:off x="7969249" y="2547937"/>
+            <a:ext cx="3889374" cy="1420812"/>
           </a:xfrm>
           <a:prstGeom prst="roundRect">
             <a:avLst>
-              <a:gd name="adj" fmla="val 4500"/>
+              <a:gd name="adj" fmla="val 5027"/>
             </a:avLst>
           </a:prstGeom>
           <a:solidFill>
@@ -7298,12 +7298,12 @@
         </p:nvSpPr>
         <p:spPr>
           <a:xfrm>
-            <a:off x="7778749" y="3413124"/>
-            <a:ext cx="63499" cy="1587499"/>
+            <a:off x="7969249" y="2547937"/>
+            <a:ext cx="47624" cy="1420812"/>
           </a:xfrm>
           <a:prstGeom prst="roundRect">
             <a:avLst>
-              <a:gd name="adj" fmla="val 37500"/>
+              <a:gd name="adj" fmla="val 50000"/>
             </a:avLst>
           </a:prstGeom>
           <a:solidFill>
@@ -7344,8 +7344,8 @@
         </p:nvSpPr>
         <p:spPr>
           <a:xfrm>
-            <a:off x="8048624" y="3921124"/>
-            <a:ext cx="325437" cy="261937"/>
+            <a:off x="8159749" y="3143249"/>
+            <a:ext cx="285749" cy="238124"/>
           </a:xfrm>
           <a:prstGeom prst="rect">
             <a:avLst/>
@@ -7356,7 +7356,7 @@
               <a:srgbClr val="111A24"/>
             </a:solidFill>
             <a:custDash>
-              <a:ds d="164706" sp="141176"/>
+              <a:ds d="146405" sp="125490"/>
             </a:custDash>
           </a:ln>
           <a:effectLst/>
@@ -7391,8 +7391,8 @@
         </p:nvSpPr>
         <p:spPr>
           <a:xfrm>
-            <a:off x="8524874" y="3889374"/>
-            <a:ext cx="2984499" cy="325437"/>
+            <a:off x="8572499" y="2849562"/>
+            <a:ext cx="3190874" cy="420687"/>
           </a:xfrm>
           <a:prstGeom prst="rect">
             <a:avLst/>
@@ -7408,7 +7408,7 @@
           <a:p>
             <a:pPr algn="l" fontAlgn="base">
               <a:lnSpc>
-                <a:spcPts val="2187"/>
+                <a:spcPts val="2812"/>
               </a:lnSpc>
               <a:spcBef>
                 <a:spcPts val="0"/>
@@ -7416,7 +7416,7 @@
               <a:spcAft>
                 <a:spcPts val="0"/>
               </a:spcAft>
-              <a:defRPr sz="1499" b="1" i="0" lang="zh-CN" dirty="0">
+              <a:defRPr sz="1937" b="1" i="0" lang="zh-CN" dirty="0">
                 <a:solidFill>
                   <a:srgbClr val="2B3E57"/>
                 </a:solidFill>
@@ -7426,7 +7426,7 @@
               </a:defRPr>
             </a:pPr>
             <a:r>
-              <a:rPr sz="1499" b="1" i="0" lang="zh-CN" dirty="0">
+              <a:rPr sz="1937" b="1" i="0" lang="zh-CN" dirty="0">
                 <a:solidFill>
                   <a:srgbClr val="2B3E57"/>
                 </a:solidFill>
@@ -7447,8 +7447,8 @@
         </p:nvSpPr>
         <p:spPr>
           <a:xfrm>
-            <a:off x="8524874" y="4246562"/>
-            <a:ext cx="2984499" cy="277812"/>
+            <a:off x="8572499" y="3286124"/>
+            <a:ext cx="3190874" cy="373062"/>
           </a:xfrm>
           <a:prstGeom prst="rect">
             <a:avLst/>
@@ -7464,7 +7464,7 @@
           <a:p>
             <a:pPr algn="l" fontAlgn="base">
               <a:lnSpc>
-                <a:spcPts val="1828"/>
+                <a:spcPts val="2546"/>
               </a:lnSpc>
               <a:spcBef>
                 <a:spcPts val="0"/>
@@ -7472,7 +7472,7 @@
               <a:spcAft>
                 <a:spcPts val="0"/>
               </a:spcAft>
-              <a:defRPr sz="1249" b="1" i="0" lang="zh-CN" dirty="0">
+              <a:defRPr sz="1749" b="0" i="0" lang="zh-CN" dirty="0">
                 <a:solidFill>
                   <a:srgbClr val="27303A"/>
                 </a:solidFill>
@@ -7482,7 +7482,7 @@
               </a:defRPr>
             </a:pPr>
             <a:r>
-              <a:rPr sz="1249" b="1" i="0" lang="zh-CN" dirty="0">
+              <a:rPr sz="1749" b="0" i="0" lang="zh-CN" dirty="0">
                 <a:solidFill>
                   <a:srgbClr val="27303A"/>
                 </a:solidFill>
@@ -7493,7 +7493,7 @@
               <a:t>直接</a:t>
             </a:r>
             <a:r>
-              <a:rPr sz="1249" b="1" i="0" lang="zh-CN" dirty="0">
+              <a:rPr sz="1749" b="0" i="0" lang="zh-CN" dirty="0">
                 <a:solidFill>
                   <a:srgbClr val="27303A"/>
                 </a:solidFill>
@@ -7504,7 +7504,7 @@
               <a:t> / </a:t>
             </a:r>
             <a:r>
-              <a:rPr sz="1249" b="1" i="0" lang="zh-CN" dirty="0">
+              <a:rPr sz="1749" b="0" i="0" lang="zh-CN" dirty="0">
                 <a:solidFill>
                   <a:srgbClr val="27303A"/>
                 </a:solidFill>
@@ -7515,7 +7515,7 @@
               <a:t>近邻</a:t>
             </a:r>
             <a:r>
-              <a:rPr sz="1249" b="1" i="0" lang="zh-CN" dirty="0">
+              <a:rPr sz="1749" b="0" i="0" lang="zh-CN" dirty="0">
                 <a:solidFill>
                   <a:srgbClr val="27303A"/>
                 </a:solidFill>
@@ -7526,7 +7526,7 @@
               <a:t> / </a:t>
             </a:r>
             <a:r>
-              <a:rPr sz="1249" b="1" i="0" lang="zh-CN" dirty="0">
+              <a:rPr sz="1749" b="0" i="0" lang="zh-CN" dirty="0">
                 <a:solidFill>
                   <a:srgbClr val="27303A"/>
                 </a:solidFill>
@@ -7547,12 +7547,12 @@
         </p:nvSpPr>
         <p:spPr>
           <a:xfrm>
-            <a:off x="7778749" y="5635624"/>
-            <a:ext cx="3889374" cy="1587499"/>
+            <a:off x="7969249" y="4278312"/>
+            <a:ext cx="3889374" cy="1420812"/>
           </a:xfrm>
           <a:prstGeom prst="roundRect">
             <a:avLst>
-              <a:gd name="adj" fmla="val 4500"/>
+              <a:gd name="adj" fmla="val 5027"/>
             </a:avLst>
           </a:prstGeom>
           <a:solidFill>
@@ -7598,8 +7598,8 @@
         </p:nvSpPr>
         <p:spPr>
           <a:xfrm>
-            <a:off x="8151812" y="6095999"/>
-            <a:ext cx="119062" cy="119062"/>
+            <a:off x="8247062" y="4833937"/>
+            <a:ext cx="103187" cy="103187"/>
           </a:xfrm>
           <a:prstGeom prst="rect">
             <a:avLst/>
@@ -7642,8 +7642,8 @@
         </p:nvSpPr>
         <p:spPr>
           <a:xfrm>
-            <a:off x="8024812" y="6318249"/>
-            <a:ext cx="119062" cy="119062"/>
+            <a:off x="8135937" y="5024437"/>
+            <a:ext cx="103187" cy="103187"/>
           </a:xfrm>
           <a:prstGeom prst="rect">
             <a:avLst/>
@@ -7686,8 +7686,8 @@
         </p:nvSpPr>
         <p:spPr>
           <a:xfrm>
-            <a:off x="8286749" y="6318249"/>
-            <a:ext cx="119062" cy="119062"/>
+            <a:off x="8366124" y="5024437"/>
+            <a:ext cx="103187" cy="103187"/>
           </a:xfrm>
           <a:prstGeom prst="rect">
             <a:avLst/>
@@ -7730,8 +7730,8 @@
         </p:nvCxnSpPr>
         <p:spPr>
           <a:xfrm flipH="1">
-            <a:off x="8088312" y="6215062"/>
-            <a:ext cx="127000" cy="103187"/>
+            <a:off x="8191499" y="4937124"/>
+            <a:ext cx="111125" cy="87313"/>
           </a:xfrm>
           <a:prstGeom prst="line">
             <a:avLst/>
@@ -7766,8 +7766,8 @@
         </p:nvCxnSpPr>
         <p:spPr>
           <a:xfrm>
-            <a:off x="8215312" y="6215062"/>
-            <a:ext cx="127000" cy="103187"/>
+            <a:off x="8302624" y="4937124"/>
+            <a:ext cx="111125" cy="87313"/>
           </a:xfrm>
           <a:prstGeom prst="line">
             <a:avLst/>
@@ -7802,8 +7802,8 @@
         </p:nvSpPr>
         <p:spPr>
           <a:xfrm>
-            <a:off x="8524874" y="6111874"/>
-            <a:ext cx="2984499" cy="325437"/>
+            <a:off x="8572499" y="4587874"/>
+            <a:ext cx="3190874" cy="420687"/>
           </a:xfrm>
           <a:prstGeom prst="rect">
             <a:avLst/>
@@ -7819,7 +7819,7 @@
           <a:p>
             <a:pPr algn="l" fontAlgn="base">
               <a:lnSpc>
-                <a:spcPts val="1765"/>
+                <a:spcPts val="2281"/>
               </a:lnSpc>
               <a:spcBef>
                 <a:spcPts val="0"/>
@@ -7827,7 +7827,7 @@
               <a:spcAft>
                 <a:spcPts val="0"/>
               </a:spcAft>
-              <a:defRPr sz="1499" b="1" i="0" lang="zh-CN" dirty="0">
+              <a:defRPr sz="1937" b="1" i="0" lang="zh-CN" dirty="0">
                 <a:solidFill>
                   <a:srgbClr val="7A5410"/>
                 </a:solidFill>
@@ -7837,7 +7837,7 @@
               </a:defRPr>
             </a:pPr>
             <a:r>
-              <a:rPr sz="1499" b="1" i="0" lang="zh-CN" dirty="0">
+              <a:rPr sz="1937" b="1" i="0" lang="zh-CN" dirty="0">
                 <a:solidFill>
                   <a:srgbClr val="7A5410"/>
                 </a:solidFill>
@@ -7858,8 +7858,8 @@
         </p:nvSpPr>
         <p:spPr>
           <a:xfrm>
-            <a:off x="8524874" y="6469062"/>
-            <a:ext cx="2984499" cy="277812"/>
+            <a:off x="8572499" y="5024437"/>
+            <a:ext cx="3190874" cy="373062"/>
           </a:xfrm>
           <a:prstGeom prst="rect">
             <a:avLst/>
@@ -7875,7 +7875,7 @@
           <a:p>
             <a:pPr algn="l" fontAlgn="base">
               <a:lnSpc>
-                <a:spcPts val="1828"/>
+                <a:spcPts val="2546"/>
               </a:lnSpc>
               <a:spcBef>
                 <a:spcPts val="0"/>
@@ -7883,7 +7883,7 @@
               <a:spcAft>
                 <a:spcPts val="0"/>
               </a:spcAft>
-              <a:defRPr sz="1249" b="1" i="0" lang="zh-CN" dirty="0">
+              <a:defRPr sz="1749" b="0" i="0" lang="zh-CN" dirty="0">
                 <a:solidFill>
                   <a:srgbClr val="27303A"/>
                 </a:solidFill>
@@ -7893,7 +7893,7 @@
               </a:defRPr>
             </a:pPr>
             <a:r>
-              <a:rPr sz="1249" b="1" i="0" lang="zh-CN" dirty="0">
+              <a:rPr sz="1749" b="0" i="0" lang="zh-CN" dirty="0">
                 <a:solidFill>
                   <a:srgbClr val="27303A"/>
                 </a:solidFill>
@@ -7914,8 +7914,8 @@
         </p:nvCxnSpPr>
         <p:spPr>
           <a:xfrm flipH="1">
-            <a:off x="4762499" y="4063999"/>
-            <a:ext cx="428625" cy="0"/>
+            <a:off x="4317999" y="3254374"/>
+            <a:ext cx="452438" cy="0"/>
           </a:xfrm>
           <a:prstGeom prst="line">
             <a:avLst/>
@@ -7950,8 +7950,8 @@
         </p:nvCxnSpPr>
         <p:spPr>
           <a:xfrm>
-            <a:off x="4762499" y="1650999"/>
-            <a:ext cx="0" cy="5000625"/>
+            <a:off x="4317999" y="1349374"/>
+            <a:ext cx="0" cy="3810000"/>
           </a:xfrm>
           <a:prstGeom prst="line">
             <a:avLst/>
@@ -7986,8 +7986,8 @@
         </p:nvSpPr>
         <p:spPr>
           <a:xfrm>
-            <a:off x="4206875" y="1603375"/>
-            <a:ext cx="555625" cy="95250"/>
+            <a:off x="3587750" y="1301750"/>
+            <a:ext cx="730250" cy="95250"/>
           </a:xfrm>
           <a:custGeom>
             <a:avLst/>
@@ -7996,9 +7996,9 @@
             <a:cxnLst/>
             <a:rect l="l" t="t" r="r" b="b"/>
             <a:pathLst>
-              <a:path w="70000" h="12000">
+              <a:path w="92000" h="12000">
                 <a:moveTo>
-                  <a:pt x="70000" y="7250"/>
+                  <a:pt x="92000" y="7250"/>
                 </a:moveTo>
                 <a:lnTo>
                   <a:pt x="15000" y="7250"/>
@@ -8016,7 +8016,7 @@
                   <a:pt x="15000" y="4750"/>
                 </a:lnTo>
                 <a:lnTo>
-                  <a:pt x="70000" y="4750"/>
+                  <a:pt x="92000" y="4750"/>
                 </a:lnTo>
                 <a:close/>
               </a:path>
@@ -8060,8 +8060,8 @@
         </p:nvSpPr>
         <p:spPr>
           <a:xfrm>
-            <a:off x="4198937" y="1206499"/>
-            <a:ext cx="571499" cy="309562"/>
+            <a:off x="3587749" y="881062"/>
+            <a:ext cx="698499" cy="404812"/>
           </a:xfrm>
           <a:prstGeom prst="roundRect">
             <a:avLst>
@@ -8108,8 +8108,8 @@
         </p:nvSpPr>
         <p:spPr>
           <a:xfrm>
-            <a:off x="4278312" y="1238249"/>
-            <a:ext cx="412749" cy="246062"/>
+            <a:off x="3667124" y="912812"/>
+            <a:ext cx="539749" cy="341312"/>
           </a:xfrm>
           <a:prstGeom prst="rect">
             <a:avLst/>
@@ -8125,7 +8125,7 @@
           <a:p>
             <a:pPr algn="ctr" fontAlgn="base">
               <a:lnSpc>
-                <a:spcPts val="1640"/>
+                <a:spcPts val="2359"/>
               </a:lnSpc>
               <a:spcBef>
                 <a:spcPts val="0"/>
@@ -8133,7 +8133,7 @@
               <a:spcAft>
                 <a:spcPts val="0"/>
               </a:spcAft>
-              <a:defRPr sz="1124" b="1" i="0" lang="zh-CN" dirty="0">
+              <a:defRPr sz="1624" b="0" i="0" lang="zh-CN" dirty="0">
                 <a:solidFill>
                   <a:srgbClr val="27303A"/>
                 </a:solidFill>
@@ -8143,7 +8143,7 @@
               </a:defRPr>
             </a:pPr>
             <a:r>
-              <a:rPr sz="1124" b="1" i="0" lang="zh-CN" dirty="0">
+              <a:rPr sz="1624" b="0" i="0" lang="zh-CN" dirty="0">
                 <a:solidFill>
                   <a:srgbClr val="27303A"/>
                 </a:solidFill>
@@ -8164,8 +8164,8 @@
         </p:nvSpPr>
         <p:spPr>
           <a:xfrm>
-            <a:off x="4206875" y="3270250"/>
-            <a:ext cx="555625" cy="95250"/>
+            <a:off x="3587750" y="2571750"/>
+            <a:ext cx="730250" cy="95250"/>
           </a:xfrm>
           <a:custGeom>
             <a:avLst/>
@@ -8174,9 +8174,9 @@
             <a:cxnLst/>
             <a:rect l="l" t="t" r="r" b="b"/>
             <a:pathLst>
-              <a:path w="70000" h="12000">
+              <a:path w="92000" h="12000">
                 <a:moveTo>
-                  <a:pt x="70000" y="7250"/>
+                  <a:pt x="92000" y="7250"/>
                 </a:moveTo>
                 <a:lnTo>
                   <a:pt x="15000" y="7250"/>
@@ -8194,7 +8194,7 @@
                   <a:pt x="15000" y="4750"/>
                 </a:lnTo>
                 <a:lnTo>
-                  <a:pt x="70000" y="4750"/>
+                  <a:pt x="92000" y="4750"/>
                 </a:lnTo>
                 <a:close/>
               </a:path>
@@ -8238,8 +8238,8 @@
         </p:nvSpPr>
         <p:spPr>
           <a:xfrm>
-            <a:off x="4198937" y="2873374"/>
-            <a:ext cx="571499" cy="309562"/>
+            <a:off x="3587749" y="2151062"/>
+            <a:ext cx="698499" cy="404812"/>
           </a:xfrm>
           <a:prstGeom prst="roundRect">
             <a:avLst>
@@ -8286,8 +8286,8 @@
         </p:nvSpPr>
         <p:spPr>
           <a:xfrm>
-            <a:off x="4278312" y="2905124"/>
-            <a:ext cx="412749" cy="246062"/>
+            <a:off x="3667124" y="2182812"/>
+            <a:ext cx="539749" cy="341312"/>
           </a:xfrm>
           <a:prstGeom prst="rect">
             <a:avLst/>
@@ -8303,7 +8303,7 @@
           <a:p>
             <a:pPr algn="ctr" fontAlgn="base">
               <a:lnSpc>
-                <a:spcPts val="1640"/>
+                <a:spcPts val="2359"/>
               </a:lnSpc>
               <a:spcBef>
                 <a:spcPts val="0"/>
@@ -8311,7 +8311,7 @@
               <a:spcAft>
                 <a:spcPts val="0"/>
               </a:spcAft>
-              <a:defRPr sz="1124" b="1" i="0" lang="zh-CN" dirty="0">
+              <a:defRPr sz="1624" b="0" i="0" lang="zh-CN" dirty="0">
                 <a:solidFill>
                   <a:srgbClr val="27303A"/>
                 </a:solidFill>
@@ -8321,7 +8321,7 @@
               </a:defRPr>
             </a:pPr>
             <a:r>
-              <a:rPr sz="1124" b="1" i="0" lang="zh-CN" dirty="0">
+              <a:rPr sz="1624" b="0" i="0" lang="zh-CN" dirty="0">
                 <a:solidFill>
                   <a:srgbClr val="27303A"/>
                 </a:solidFill>
@@ -8342,8 +8342,8 @@
         </p:nvSpPr>
         <p:spPr>
           <a:xfrm>
-            <a:off x="4206875" y="4937125"/>
-            <a:ext cx="555625" cy="95250"/>
+            <a:off x="3587750" y="3841750"/>
+            <a:ext cx="730250" cy="95250"/>
           </a:xfrm>
           <a:custGeom>
             <a:avLst/>
@@ -8352,9 +8352,9 @@
             <a:cxnLst/>
             <a:rect l="l" t="t" r="r" b="b"/>
             <a:pathLst>
-              <a:path w="70000" h="12000">
+              <a:path w="92000" h="12000">
                 <a:moveTo>
-                  <a:pt x="70000" y="7250"/>
+                  <a:pt x="92000" y="7250"/>
                 </a:moveTo>
                 <a:lnTo>
                   <a:pt x="15000" y="7250"/>
@@ -8372,7 +8372,7 @@
                   <a:pt x="15000" y="4750"/>
                 </a:lnTo>
                 <a:lnTo>
-                  <a:pt x="70000" y="4750"/>
+                  <a:pt x="92000" y="4750"/>
                 </a:lnTo>
                 <a:close/>
               </a:path>
@@ -8416,8 +8416,8 @@
         </p:nvSpPr>
         <p:spPr>
           <a:xfrm>
-            <a:off x="4198937" y="4540249"/>
-            <a:ext cx="571499" cy="309562"/>
+            <a:off x="3587749" y="3421062"/>
+            <a:ext cx="698499" cy="404812"/>
           </a:xfrm>
           <a:prstGeom prst="roundRect">
             <a:avLst>
@@ -8464,8 +8464,8 @@
         </p:nvSpPr>
         <p:spPr>
           <a:xfrm>
-            <a:off x="4278312" y="4571999"/>
-            <a:ext cx="412749" cy="246062"/>
+            <a:off x="3667124" y="3452812"/>
+            <a:ext cx="539749" cy="341312"/>
           </a:xfrm>
           <a:prstGeom prst="rect">
             <a:avLst/>
@@ -8481,7 +8481,7 @@
           <a:p>
             <a:pPr algn="ctr" fontAlgn="base">
               <a:lnSpc>
-                <a:spcPts val="1640"/>
+                <a:spcPts val="2359"/>
               </a:lnSpc>
               <a:spcBef>
                 <a:spcPts val="0"/>
@@ -8489,7 +8489,7 @@
               <a:spcAft>
                 <a:spcPts val="0"/>
               </a:spcAft>
-              <a:defRPr sz="1124" b="1" i="0" lang="zh-CN" dirty="0">
+              <a:defRPr sz="1624" b="0" i="0" lang="zh-CN" dirty="0">
                 <a:solidFill>
                   <a:srgbClr val="27303A"/>
                 </a:solidFill>
@@ -8499,7 +8499,7 @@
               </a:defRPr>
             </a:pPr>
             <a:r>
-              <a:rPr sz="1124" b="1" i="0" lang="zh-CN" dirty="0">
+              <a:rPr sz="1624" b="0" i="0" lang="zh-CN" dirty="0">
                 <a:solidFill>
                   <a:srgbClr val="27303A"/>
                 </a:solidFill>
@@ -8520,8 +8520,8 @@
         </p:nvSpPr>
         <p:spPr>
           <a:xfrm>
-            <a:off x="4206875" y="6604000"/>
-            <a:ext cx="555625" cy="95250"/>
+            <a:off x="3587750" y="5111750"/>
+            <a:ext cx="730250" cy="95250"/>
           </a:xfrm>
           <a:custGeom>
             <a:avLst/>
@@ -8530,9 +8530,9 @@
             <a:cxnLst/>
             <a:rect l="l" t="t" r="r" b="b"/>
             <a:pathLst>
-              <a:path w="70000" h="12000">
+              <a:path w="92000" h="12000">
                 <a:moveTo>
-                  <a:pt x="70000" y="7250"/>
+                  <a:pt x="92000" y="7250"/>
                 </a:moveTo>
                 <a:lnTo>
                   <a:pt x="15000" y="7250"/>
@@ -8550,7 +8550,7 @@
                   <a:pt x="15000" y="4750"/>
                 </a:lnTo>
                 <a:lnTo>
-                  <a:pt x="70000" y="4750"/>
+                  <a:pt x="92000" y="4750"/>
                 </a:lnTo>
                 <a:close/>
               </a:path>
@@ -8594,8 +8594,8 @@
         </p:nvSpPr>
         <p:spPr>
           <a:xfrm>
-            <a:off x="4198937" y="6207124"/>
-            <a:ext cx="571499" cy="309562"/>
+            <a:off x="3587749" y="4691062"/>
+            <a:ext cx="698499" cy="404812"/>
           </a:xfrm>
           <a:prstGeom prst="roundRect">
             <a:avLst>
@@ -8642,8 +8642,8 @@
         </p:nvSpPr>
         <p:spPr>
           <a:xfrm>
-            <a:off x="4278312" y="6238874"/>
-            <a:ext cx="412749" cy="246062"/>
+            <a:off x="3667124" y="4722812"/>
+            <a:ext cx="539749" cy="341312"/>
           </a:xfrm>
           <a:prstGeom prst="rect">
             <a:avLst/>
@@ -8659,7 +8659,7 @@
           <a:p>
             <a:pPr algn="ctr" fontAlgn="base">
               <a:lnSpc>
-                <a:spcPts val="1640"/>
+                <a:spcPts val="2359"/>
               </a:lnSpc>
               <a:spcBef>
                 <a:spcPts val="0"/>
@@ -8667,7 +8667,7 @@
               <a:spcAft>
                 <a:spcPts val="0"/>
               </a:spcAft>
-              <a:defRPr sz="1124" b="1" i="0" lang="zh-CN" dirty="0">
+              <a:defRPr sz="1624" b="0" i="0" lang="zh-CN" dirty="0">
                 <a:solidFill>
                   <a:srgbClr val="27303A"/>
                 </a:solidFill>
@@ -8677,7 +8677,7 @@
               </a:defRPr>
             </a:pPr>
             <a:r>
-              <a:rPr sz="1124" b="1" i="0" lang="zh-CN" dirty="0">
+              <a:rPr sz="1624" b="0" i="0" lang="zh-CN" dirty="0">
                 <a:solidFill>
                   <a:srgbClr val="27303A"/>
                 </a:solidFill>
@@ -8698,8 +8698,8 @@
         </p:nvCxnSpPr>
         <p:spPr>
           <a:xfrm>
-            <a:off x="7000874" y="4063999"/>
-            <a:ext cx="142875" cy="0"/>
+            <a:off x="6754812" y="3254374"/>
+            <a:ext cx="452437" cy="0"/>
           </a:xfrm>
           <a:prstGeom prst="line">
             <a:avLst/>
@@ -8734,8 +8734,8 @@
         </p:nvCxnSpPr>
         <p:spPr>
           <a:xfrm>
-            <a:off x="7143749" y="1984374"/>
-            <a:ext cx="0" cy="4445000"/>
+            <a:off x="7207249" y="1516062"/>
+            <a:ext cx="0" cy="3476625"/>
           </a:xfrm>
           <a:prstGeom prst="line">
             <a:avLst/>
@@ -8770,8 +8770,8 @@
         </p:nvSpPr>
         <p:spPr>
           <a:xfrm>
-            <a:off x="7143750" y="1936750"/>
-            <a:ext cx="603250" cy="95250"/>
+            <a:off x="7207250" y="1468437"/>
+            <a:ext cx="730250" cy="95250"/>
           </a:xfrm>
           <a:custGeom>
             <a:avLst/>
@@ -8780,24 +8780,24 @@
             <a:cxnLst/>
             <a:rect l="l" t="t" r="r" b="b"/>
             <a:pathLst>
-              <a:path w="76000" h="12000">
+              <a:path w="92000" h="12000">
                 <a:moveTo>
                   <a:pt x="0" y="4750"/>
                 </a:moveTo>
                 <a:lnTo>
-                  <a:pt x="61000" y="4750"/>
+                  <a:pt x="77000" y="4750"/>
                 </a:lnTo>
                 <a:lnTo>
-                  <a:pt x="61000" y="0"/>
+                  <a:pt x="77000" y="0"/>
                 </a:lnTo>
                 <a:lnTo>
-                  <a:pt x="76000" y="6000"/>
+                  <a:pt x="92000" y="6000"/>
                 </a:lnTo>
                 <a:lnTo>
-                  <a:pt x="61000" y="12000"/>
+                  <a:pt x="77000" y="12000"/>
                 </a:lnTo>
                 <a:lnTo>
-                  <a:pt x="61000" y="7250"/>
+                  <a:pt x="77000" y="7250"/>
                 </a:lnTo>
                 <a:lnTo>
                   <a:pt x="0" y="7250"/>
@@ -8844,8 +8844,8 @@
         </p:nvSpPr>
         <p:spPr>
           <a:xfrm>
-            <a:off x="7159624" y="1539874"/>
-            <a:ext cx="571499" cy="309562"/>
+            <a:off x="7238999" y="1047749"/>
+            <a:ext cx="698499" cy="404812"/>
           </a:xfrm>
           <a:prstGeom prst="roundRect">
             <a:avLst>
@@ -8892,8 +8892,8 @@
         </p:nvSpPr>
         <p:spPr>
           <a:xfrm>
-            <a:off x="7238999" y="1571624"/>
-            <a:ext cx="412749" cy="246062"/>
+            <a:off x="7318374" y="1079499"/>
+            <a:ext cx="539749" cy="341312"/>
           </a:xfrm>
           <a:prstGeom prst="rect">
             <a:avLst/>
@@ -8909,7 +8909,7 @@
           <a:p>
             <a:pPr algn="ctr" fontAlgn="base">
               <a:lnSpc>
-                <a:spcPts val="1640"/>
+                <a:spcPts val="2359"/>
               </a:lnSpc>
               <a:spcBef>
                 <a:spcPts val="0"/>
@@ -8917,7 +8917,7 @@
               <a:spcAft>
                 <a:spcPts val="0"/>
               </a:spcAft>
-              <a:defRPr sz="1124" b="1" i="0" lang="zh-CN" dirty="0">
+              <a:defRPr sz="1624" b="0" i="0" lang="zh-CN" dirty="0">
                 <a:solidFill>
                   <a:srgbClr val="27303A"/>
                 </a:solidFill>
@@ -8927,7 +8927,7 @@
               </a:defRPr>
             </a:pPr>
             <a:r>
-              <a:rPr sz="1124" b="1" i="0" lang="zh-CN" dirty="0">
+              <a:rPr sz="1624" b="0" i="0" lang="zh-CN" dirty="0">
                 <a:solidFill>
                   <a:srgbClr val="27303A"/>
                 </a:solidFill>
@@ -8948,8 +8948,8 @@
         </p:nvSpPr>
         <p:spPr>
           <a:xfrm>
-            <a:off x="7143750" y="4159250"/>
-            <a:ext cx="603250" cy="95250"/>
+            <a:off x="7207250" y="3206750"/>
+            <a:ext cx="730250" cy="95250"/>
           </a:xfrm>
           <a:custGeom>
             <a:avLst/>
@@ -8958,24 +8958,24 @@
             <a:cxnLst/>
             <a:rect l="l" t="t" r="r" b="b"/>
             <a:pathLst>
-              <a:path w="76000" h="12000">
+              <a:path w="92000" h="12000">
                 <a:moveTo>
                   <a:pt x="0" y="4750"/>
                 </a:moveTo>
                 <a:lnTo>
-                  <a:pt x="61000" y="4750"/>
+                  <a:pt x="77000" y="4750"/>
                 </a:lnTo>
                 <a:lnTo>
-                  <a:pt x="61000" y="0"/>
+                  <a:pt x="77000" y="0"/>
                 </a:lnTo>
                 <a:lnTo>
-                  <a:pt x="76000" y="6000"/>
+                  <a:pt x="92000" y="6000"/>
                 </a:lnTo>
                 <a:lnTo>
-                  <a:pt x="61000" y="12000"/>
+                  <a:pt x="77000" y="12000"/>
                 </a:lnTo>
                 <a:lnTo>
-                  <a:pt x="61000" y="7250"/>
+                  <a:pt x="77000" y="7250"/>
                 </a:lnTo>
                 <a:lnTo>
                   <a:pt x="0" y="7250"/>
@@ -9022,8 +9022,8 @@
         </p:nvSpPr>
         <p:spPr>
           <a:xfrm>
-            <a:off x="7159624" y="3762374"/>
-            <a:ext cx="571499" cy="309562"/>
+            <a:off x="7238999" y="2786062"/>
+            <a:ext cx="698499" cy="404812"/>
           </a:xfrm>
           <a:prstGeom prst="roundRect">
             <a:avLst>
@@ -9070,8 +9070,8 @@
         </p:nvSpPr>
         <p:spPr>
           <a:xfrm>
-            <a:off x="7238999" y="3794124"/>
-            <a:ext cx="412749" cy="246062"/>
+            <a:off x="7318374" y="2817812"/>
+            <a:ext cx="539749" cy="341312"/>
           </a:xfrm>
           <a:prstGeom prst="rect">
             <a:avLst/>
@@ -9087,7 +9087,7 @@
           <a:p>
             <a:pPr algn="ctr" fontAlgn="base">
               <a:lnSpc>
-                <a:spcPts val="1640"/>
+                <a:spcPts val="2359"/>
               </a:lnSpc>
               <a:spcBef>
                 <a:spcPts val="0"/>
@@ -9095,7 +9095,7 @@
               <a:spcAft>
                 <a:spcPts val="0"/>
               </a:spcAft>
-              <a:defRPr sz="1124" b="1" i="0" lang="zh-CN" dirty="0">
+              <a:defRPr sz="1624" b="0" i="0" lang="zh-CN" dirty="0">
                 <a:solidFill>
                   <a:srgbClr val="27303A"/>
                 </a:solidFill>
@@ -9105,7 +9105,7 @@
               </a:defRPr>
             </a:pPr>
             <a:r>
-              <a:rPr sz="1124" b="1" i="0" lang="zh-CN" dirty="0">
+              <a:rPr sz="1624" b="0" i="0" lang="zh-CN" dirty="0">
                 <a:solidFill>
                   <a:srgbClr val="27303A"/>
                 </a:solidFill>
@@ -9126,8 +9126,8 @@
         </p:nvCxnSpPr>
         <p:spPr>
           <a:xfrm>
-            <a:off x="7143749" y="6429374"/>
-            <a:ext cx="603250" cy="0"/>
+            <a:off x="7207249" y="4992687"/>
+            <a:ext cx="730250" cy="0"/>
           </a:xfrm>
           <a:prstGeom prst="line">
             <a:avLst/>
@@ -9166,8 +9166,8 @@
         </p:nvSpPr>
         <p:spPr>
           <a:xfrm>
-            <a:off x="7159624" y="5984874"/>
-            <a:ext cx="571499" cy="309562"/>
+            <a:off x="7238999" y="4524374"/>
+            <a:ext cx="698499" cy="404812"/>
           </a:xfrm>
           <a:prstGeom prst="roundRect">
             <a:avLst>
@@ -9214,8 +9214,8 @@
         </p:nvSpPr>
         <p:spPr>
           <a:xfrm>
-            <a:off x="7238999" y="6016624"/>
-            <a:ext cx="412749" cy="246062"/>
+            <a:off x="7318374" y="4556124"/>
+            <a:ext cx="539749" cy="341312"/>
           </a:xfrm>
           <a:prstGeom prst="rect">
             <a:avLst/>
@@ -9231,7 +9231,7 @@
           <a:p>
             <a:pPr algn="ctr" fontAlgn="base">
               <a:lnSpc>
-                <a:spcPts val="1640"/>
+                <a:spcPts val="2359"/>
               </a:lnSpc>
               <a:spcBef>
                 <a:spcPts val="0"/>
@@ -9239,7 +9239,7 @@
               <a:spcAft>
                 <a:spcPts val="0"/>
               </a:spcAft>
-              <a:defRPr sz="1124" b="1" i="0" lang="zh-CN" dirty="0">
+              <a:defRPr sz="1624" b="0" i="0" lang="zh-CN" dirty="0">
                 <a:solidFill>
                   <a:srgbClr val="7A5410"/>
                 </a:solidFill>
@@ -9249,7 +9249,7 @@
               </a:defRPr>
             </a:pPr>
             <a:r>
-              <a:rPr sz="1124" b="1" i="0" lang="zh-CN" dirty="0">
+              <a:rPr sz="1624" b="0" i="0" lang="zh-CN" dirty="0">
                 <a:solidFill>
                   <a:srgbClr val="7A5410"/>
                 </a:solidFill>
